--- a/doc/12_データベース構造レビュー資料.pptx
+++ b/doc/12_データベース構造レビュー資料.pptx
@@ -26746,7 +26746,7 @@
         <p:spPr>
           <a:xfrm>
             <a:off x="457200" y="3493008"/>
-            <a:ext cx="5486400" cy="1280160"/>
+            <a:ext cx="5486400" cy="1188720"/>
           </a:xfrm>
           <a:prstGeom prst="rect">
             <a:avLst/>
@@ -27443,8 +27443,8 @@
         </p:nvSpPr>
         <p:spPr>
           <a:xfrm>
-            <a:off x="457200" y="4846320"/>
-            <a:ext cx="5486400" cy="914400"/>
+            <a:off x="457200" y="4736592"/>
+            <a:ext cx="5486400" cy="822960"/>
           </a:xfrm>
           <a:prstGeom prst="roundRect">
             <a:avLst>
@@ -27489,8 +27489,8 @@
         </p:nvSpPr>
         <p:spPr>
           <a:xfrm>
-            <a:off x="457200" y="4846320"/>
-            <a:ext cx="68580" cy="914400"/>
+            <a:off x="457200" y="4736592"/>
+            <a:ext cx="68580" cy="822960"/>
           </a:xfrm>
           <a:prstGeom prst="rect">
             <a:avLst/>
@@ -27533,7 +27533,7 @@
         </p:nvSpPr>
         <p:spPr>
           <a:xfrm>
-            <a:off x="640080" y="4937759"/>
+            <a:off x="640080" y="4828031"/>
             <a:ext cx="5120640" cy="237744"/>
           </a:xfrm>
           <a:prstGeom prst="rect">
@@ -27575,8 +27575,8 @@
         </p:nvSpPr>
         <p:spPr>
           <a:xfrm>
-            <a:off x="640080" y="5193792"/>
-            <a:ext cx="5138928" cy="493776"/>
+            <a:off x="640080" y="5084064"/>
+            <a:ext cx="5138928" cy="402336"/>
           </a:xfrm>
           <a:prstGeom prst="rect">
             <a:avLst/>

--- a/doc/12_データベース構造レビュー資料.pptx
+++ b/doc/12_データベース構造レビュー資料.pptx
@@ -3326,7 +3326,7 @@
                 <a:cs typeface="Meiryo"/>
                 <a:ea typeface="Meiryo"/>
               </a:rPr>
-              <a:t>訪問保育(ベビーシッター法人)向け業務SaaS — PostgreSQL / 33テーブル</a:t>
+              <a:t>訪問保育(ベビーシッター法人)向け業務SaaS — PostgreSQL / 34テーブル</a:t>
             </a:r>
           </a:p>
         </p:txBody>
@@ -8523,7 +8523,7 @@
                 <a:cs typeface="Meiryo"/>
                 <a:ea typeface="Meiryo"/>
               </a:rPr>
-              <a:t>静的検査:全33テーブル分のSQLに ENABLE と FORCE、ポリシーの条件が揃っているかを機械的に検査。新しい表を足して書き忘れると落ちる</a:t>
+              <a:t>静的検査:全34テーブル分のSQLに ENABLE と FORCE、ポリシーの条件が揃っているかを機械的に検査。新しい表を足して書き忘れると落ちる</a:t>
             </a:r>
           </a:p>
           <a:p>
@@ -16430,7 +16430,7 @@
                 <a:cs typeface="Meiryo"/>
                 <a:ea typeface="Meiryo"/>
               </a:rPr>
-              <a:t>33テーブルで守っている共通ルール</a:t>
+              <a:t>34テーブルで守っている共通ルール</a:t>
             </a:r>
             <a:r>
               <a:rPr sz="1250" b="0" i="0">
@@ -23363,7 +23363,7 @@
                 <a:cs typeface="Meiryo"/>
                 <a:ea typeface="Meiryo"/>
               </a:rPr>
-              <a:t>33テーブルの全体像と、
+              <a:t>34テーブルの全体像と、
 テナント分離・データ保護</a:t>
             </a:r>
           </a:p>
@@ -37447,7 +37447,7 @@
                 <a:cs typeface="Meiryo"/>
                 <a:ea typeface="Meiryo"/>
               </a:rPr>
-              <a:t>  33テーブルの定義。列ごとに「なぜこの形か」をコメントで書いてある</a:t>
+              <a:t>  34テーブルの定義。列ごとに「なぜこの形か」をコメントで書いてある</a:t>
             </a:r>
           </a:p>
           <a:p>
@@ -37558,7 +37558,7 @@
                 <a:cs typeface="Meiryo"/>
                 <a:ea typeface="Meiryo"/>
               </a:rPr>
-              <a:t>  業務ロジックが外部に求める窓口の定義(28本)</a:t>
+              <a:t>  業務ロジックが外部に求める窓口の定義(29本)</a:t>
             </a:r>
           </a:p>
         </p:txBody>
@@ -42744,7 +42744,7 @@
                 <a:cs typeface="Meiryo"/>
                 <a:ea typeface="Meiryo"/>
               </a:rPr>
-              <a:t>33テーブルの全体像と、テナント分離・データ保護・トランザクションの考え方</a:t>
+              <a:t>34テーブルの全体像と、テナント分離・データ保護・トランザクションの考え方</a:t>
             </a:r>
           </a:p>
         </p:txBody>
@@ -44998,7 +44998,7 @@
                 <a:cs typeface="Meiryo"/>
                 <a:ea typeface="Meiryo"/>
               </a:rPr>
-              <a:t>全体像 — 33テーブル</a:t>
+              <a:t>全体像 — 34テーブル</a:t>
             </a:r>
             <a:r>
               <a:rPr sz="1250" b="0" i="0">
@@ -45009,7 +45009,7 @@
                 <a:cs typeface="Meiryo"/>
                 <a:ea typeface="Meiryo"/>
               </a:rPr>
-              <a:t>   業務ドメインごとに10のまとまり。tenants以外の32枚はすべて同じ形を守る</a:t>
+              <a:t>   業務ドメインごとに10のまとまり。tenants以外の33枚はすべて同じ形を守る</a:t>
             </a:r>
           </a:p>
         </p:txBody>
@@ -45419,7 +45419,7 @@
                 <a:cs typeface="Meiryo"/>
                 <a:ea typeface="Meiryo"/>
               </a:rPr>
-              <a:t>稼働中 — アプリが読み書きしている15枚</a:t>
+              <a:t>稼働中 — アプリが読み書きしている16枚</a:t>
             </a:r>
           </a:p>
         </p:txBody>
@@ -46136,7 +46136,7 @@
                 <a:cs typeface="Meiryo"/>
                 <a:ea typeface="Meiryo"/>
               </a:rPr>
-              <a:t>割引クーポン (2)</a:t>
+              <a:t>割引クーポン (3)</a:t>
             </a:r>
           </a:p>
         </p:txBody>
@@ -46179,6 +46179,7 @@
                 <a:ea typeface="Consolas"/>
               </a:rPr>
               <a:t>coupons
+customer_coupons
 coupon_redemptions</a:t>
             </a:r>
           </a:p>
